--- a/HostIt_Project_Charter_Pitch.pptx
+++ b/HostIt_Project_Charter_Pitch.pptx
@@ -308,7 +308,7 @@
           <a:p>
             <a:fld id="{5BCAD085-E8A6-8845-BD4E-CB4CCA059FC4}" type="datetimeFigureOut">
               <a:rPr lang="en-US" smtClean="0"/>
-              <a:t>10/5/2026</a:t>
+              <a:t>10/7/2026</a:t>
             </a:fld>
             <a:endParaRPr lang="en-US"/>
           </a:p>
@@ -476,7 +476,7 @@
           <a:p>
             <a:fld id="{5BCAD085-E8A6-8845-BD4E-CB4CCA059FC4}" type="datetimeFigureOut">
               <a:rPr lang="en-US" smtClean="0"/>
-              <a:t>10/5/2026</a:t>
+              <a:t>10/7/2026</a:t>
             </a:fld>
             <a:endParaRPr lang="en-US"/>
           </a:p>
@@ -654,7 +654,7 @@
           <a:p>
             <a:fld id="{5BCAD085-E8A6-8845-BD4E-CB4CCA059FC4}" type="datetimeFigureOut">
               <a:rPr lang="en-US" smtClean="0"/>
-              <a:t>10/5/2026</a:t>
+              <a:t>10/7/2026</a:t>
             </a:fld>
             <a:endParaRPr lang="en-US"/>
           </a:p>
@@ -822,7 +822,7 @@
           <a:p>
             <a:fld id="{5BCAD085-E8A6-8845-BD4E-CB4CCA059FC4}" type="datetimeFigureOut">
               <a:rPr lang="en-US" smtClean="0"/>
-              <a:t>10/5/2026</a:t>
+              <a:t>10/7/2026</a:t>
             </a:fld>
             <a:endParaRPr lang="en-US"/>
           </a:p>
@@ -1067,7 +1067,7 @@
           <a:p>
             <a:fld id="{5BCAD085-E8A6-8845-BD4E-CB4CCA059FC4}" type="datetimeFigureOut">
               <a:rPr lang="en-US" smtClean="0"/>
-              <a:t>10/5/2026</a:t>
+              <a:t>10/7/2026</a:t>
             </a:fld>
             <a:endParaRPr lang="en-US"/>
           </a:p>
@@ -1352,7 +1352,7 @@
           <a:p>
             <a:fld id="{5BCAD085-E8A6-8845-BD4E-CB4CCA059FC4}" type="datetimeFigureOut">
               <a:rPr lang="en-US" smtClean="0"/>
-              <a:t>10/5/2026</a:t>
+              <a:t>10/7/2026</a:t>
             </a:fld>
             <a:endParaRPr lang="en-US"/>
           </a:p>
@@ -1771,7 +1771,7 @@
           <a:p>
             <a:fld id="{5BCAD085-E8A6-8845-BD4E-CB4CCA059FC4}" type="datetimeFigureOut">
               <a:rPr lang="en-US" smtClean="0"/>
-              <a:t>10/5/2026</a:t>
+              <a:t>10/7/2026</a:t>
             </a:fld>
             <a:endParaRPr lang="en-US"/>
           </a:p>
@@ -1888,7 +1888,7 @@
           <a:p>
             <a:fld id="{5BCAD085-E8A6-8845-BD4E-CB4CCA059FC4}" type="datetimeFigureOut">
               <a:rPr lang="en-US" smtClean="0"/>
-              <a:t>10/5/2026</a:t>
+              <a:t>10/7/2026</a:t>
             </a:fld>
             <a:endParaRPr lang="en-US"/>
           </a:p>
@@ -1983,7 +1983,7 @@
           <a:p>
             <a:fld id="{5BCAD085-E8A6-8845-BD4E-CB4CCA059FC4}" type="datetimeFigureOut">
               <a:rPr lang="en-US" smtClean="0"/>
-              <a:t>10/5/2026</a:t>
+              <a:t>10/7/2026</a:t>
             </a:fld>
             <a:endParaRPr lang="en-US"/>
           </a:p>
@@ -2258,7 +2258,7 @@
           <a:p>
             <a:fld id="{5BCAD085-E8A6-8845-BD4E-CB4CCA059FC4}" type="datetimeFigureOut">
               <a:rPr lang="en-US" smtClean="0"/>
-              <a:t>10/5/2026</a:t>
+              <a:t>10/7/2026</a:t>
             </a:fld>
             <a:endParaRPr lang="en-US"/>
           </a:p>
@@ -2510,7 +2510,7 @@
           <a:p>
             <a:fld id="{5BCAD085-E8A6-8845-BD4E-CB4CCA059FC4}" type="datetimeFigureOut">
               <a:rPr lang="en-US" smtClean="0"/>
-              <a:t>10/5/2026</a:t>
+              <a:t>10/7/2026</a:t>
             </a:fld>
             <a:endParaRPr lang="en-US"/>
           </a:p>
@@ -2721,7 +2721,7 @@
           <a:p>
             <a:fld id="{5BCAD085-E8A6-8845-BD4E-CB4CCA059FC4}" type="datetimeFigureOut">
               <a:rPr lang="en-US" smtClean="0"/>
-              <a:t>10/5/2026</a:t>
+              <a:t>10/7/2026</a:t>
             </a:fld>
             <a:endParaRPr lang="en-US"/>
           </a:p>
@@ -3376,7 +3376,7 @@
         <p:spPr>
           <a:xfrm>
             <a:off x="8046720" y="2075688"/>
-            <a:ext cx="3017520" cy="2514600"/>
+            <a:ext cx="3017520" cy="892552"/>
           </a:xfrm>
           <a:prstGeom prst="rect">
             <a:avLst/>
@@ -3400,7 +3400,12 @@
               </a:defRPr>
             </a:pPr>
             <a:r>
-              <a:t>• Sponsor: MCDA 5510 instructors</a:t>
+              <a:rPr dirty="0"/>
+              <a:t>• Sponsor: </a:t>
+            </a:r>
+            <a:r>
+              <a:rPr lang="en-CA" dirty="0"/>
+              <a:t>Sam &amp; Armaan</a:t>
             </a:r>
           </a:p>
           <a:p>
@@ -3415,6 +3420,7 @@
               </a:defRPr>
             </a:pPr>
             <a:r>
+              <a:rPr dirty="0"/>
               <a:t>• Project managers: Sam &amp; Armaan</a:t>
             </a:r>
           </a:p>
@@ -3430,6 +3436,7 @@
               </a:defRPr>
             </a:pPr>
             <a:r>
+              <a:rPr dirty="0"/>
               <a:t>• Charter date: October 7</a:t>
             </a:r>
           </a:p>

--- a/HostIt_Project_Charter_Pitch.pptx
+++ b/HostIt_Project_Charter_Pitch.pptx
@@ -3421,8 +3421,12 @@
             </a:pPr>
             <a:r>
               <a:rPr dirty="0"/>
-              <a:t>• Project managers: Sam &amp; Armaan</a:t>
-            </a:r>
+              <a:t>• Project manager</a:t>
+            </a:r>
+            <a:r>
+              <a:t>: Armaan</a:t>
+            </a:r>
+            <a:endParaRPr dirty="0"/>
           </a:p>
           <a:p>
             <a:pPr>
@@ -4723,7 +4727,7 @@
         <p:spPr>
           <a:xfrm>
             <a:off x="6446520" y="2167128"/>
-            <a:ext cx="4846320" cy="3566160"/>
+            <a:ext cx="4846320" cy="1477328"/>
           </a:xfrm>
           <a:prstGeom prst="rect">
             <a:avLst/>
@@ -4747,6 +4751,7 @@
               </a:defRPr>
             </a:pPr>
             <a:r>
+              <a:rPr dirty="0"/>
               <a:t>• Reservations / table booking</a:t>
             </a:r>
           </a:p>
@@ -4762,6 +4767,7 @@
               </a:defRPr>
             </a:pPr>
             <a:r>
+              <a:rPr dirty="0"/>
               <a:t>• Food ordering or delivery</a:t>
             </a:r>
           </a:p>
@@ -4777,7 +4783,8 @@
               </a:defRPr>
             </a:pPr>
             <a:r>
-              <a:t>• Real payment processing</a:t>
+              <a:rPr dirty="0"/>
+              <a:t>• Every third-party integration</a:t>
             </a:r>
           </a:p>
           <a:p>
@@ -4792,7 +4799,8 @@
               </a:defRPr>
             </a:pPr>
             <a:r>
-              <a:t>• Every third-party integration</a:t>
+              <a:rPr dirty="0"/>
+              <a:t>• Commercial deployment</a:t>
             </a:r>
           </a:p>
           <a:p>
@@ -4807,21 +4815,7 @@
               </a:defRPr>
             </a:pPr>
             <a:r>
-              <a:t>• Commercial deployment</a:t>
-            </a:r>
-          </a:p>
-          <a:p>
-            <a:pPr>
-              <a:spcAft>
-                <a:spcPts val="600"/>
-              </a:spcAft>
-              <a:defRPr sz="1400">
-                <a:solidFill>
-                  <a:srgbClr val="5F6976"/>
-                </a:solidFill>
-              </a:defRPr>
-            </a:pPr>
-            <a:r>
+              <a:rPr dirty="0"/>
               <a:t>• Post-project maintenance</a:t>
             </a:r>
           </a:p>
@@ -8027,7 +8021,7 @@
         <p:spPr>
           <a:xfrm>
             <a:off x="6629400" y="2121408"/>
-            <a:ext cx="4663440" cy="2194560"/>
+            <a:ext cx="4663440" cy="892552"/>
           </a:xfrm>
           <a:prstGeom prst="rect">
             <a:avLst/>
@@ -8051,8 +8045,14 @@
               </a:defRPr>
             </a:pPr>
             <a:r>
-              <a:t>• Sponsor / oversight: MCDA 5510 instructors</a:t>
-            </a:r>
+              <a:rPr dirty="0"/>
+              <a:t>• Sponsor / oversight:</a:t>
+            </a:r>
+            <a:r>
+              <a:rPr lang="en-CA" dirty="0"/>
+              <a:t> Sam and Armaan</a:t>
+            </a:r>
+            <a:endParaRPr dirty="0"/>
           </a:p>
           <a:p>
             <a:pPr>
@@ -8066,6 +8066,7 @@
               </a:defRPr>
             </a:pPr>
             <a:r>
+              <a:rPr dirty="0"/>
               <a:t>• Project team: Sam &amp; Armaan</a:t>
             </a:r>
           </a:p>
@@ -8081,6 +8082,7 @@
               </a:defRPr>
             </a:pPr>
             <a:r>
+              <a:rPr dirty="0"/>
               <a:t>• External steering committee: not required</a:t>
             </a:r>
           </a:p>
